--- a/PyMOL_Tutorial.pptx
+++ b/PyMOL_Tutorial.pptx
@@ -5277,7 +5277,7 @@
               </a:defRPr>
             </a:pPr>
             <a:r>
-              <a:t>색상 팔레트 &amp; 스타일 가이드</a:t>
+              <a:t>실습 7: 색상 팔레트 &amp; 스타일 가이드</a:t>
             </a:r>
           </a:p>
         </p:txBody>
@@ -10657,7 +10657,7 @@
               </a:defRPr>
             </a:pPr>
             <a:r>
-              <a:t>select site, prot w. 5 of lig</a:t>
+              <a:t>select site, prot within 5 of lig</a:t>
             </a:r>
           </a:p>
         </p:txBody>
